--- a/tools/rcn-rasch-intro.pptx
+++ b/tools/rcn-rasch-intro.pptx
@@ -16135,11 +16135,12 @@
           <a:prstGeom prst="rect">
             <a:avLst/>
           </a:prstGeom>
-          <a:solidFill>
-            <a:srgbClr val="DC2626"/>
-          </a:solidFill>
-          <a:ln>
-            <a:noFill/>
+          <a:noFill/>
+          <a:ln w="15240">
+            <a:solidFill>
+              <a:srgbClr val="B45309"/>
+            </a:solidFill>
+            <a:prstDash val="sysDash"/>
           </a:ln>
           <a:effectLst/>
         </p:spPr>
@@ -16174,7 +16175,7 @@
         <p:spPr>
           <a:xfrm>
             <a:off x="4599432" y="2883052"/>
-            <a:ext cx="2926080" cy="182880"/>
+            <a:ext cx="3108960" cy="182880"/>
           </a:xfrm>
           <a:prstGeom prst="rect">
             <a:avLst/>
@@ -16189,13 +16190,13 @@
           <a:p>
             <a:pPr algn="l"/>
             <a:r>
-              <a:rPr sz="800" b="1">
-                <a:solidFill>
-                  <a:srgbClr val="DC2626"/>
-                </a:solidFill>
-                <a:latin typeface="Calibri"/>
-              </a:rPr>
-              <a:t>stand up an NDC server   misfit</a:t>
+              <a:rPr sz="800" b="0">
+                <a:solidFill>
+                  <a:srgbClr val="94A3B8"/>
+                </a:solidFill>
+                <a:latin typeface="Calibri"/>
+              </a:rPr>
+              <a:t>stand up an NDC server   provisional — 2 on the minority side</a:t>
             </a:r>
           </a:p>
         </p:txBody>
@@ -17820,13 +17821,13 @@
               </a:lnSpc>
             </a:pPr>
             <a:r>
-              <a:rPr sz="1050" b="0" i="0">
+              <a:rPr sz="900" b="0" i="0">
                 <a:solidFill>
                   <a:srgbClr val="475569"/>
                 </a:solidFill>
                 <a:latin typeface="Calibri"/>
               </a:rPr>
-              <a:t>Is there a skill near every cluster of people, or are there gaps on the ruler? And is anything red?</a:t>
+              <a:t>Is there a skill near every cluster of people, or are there gaps on the ruler? And is anything red? A hollow bar is not red — it is too few responses to say.</a:t>
             </a:r>
           </a:p>
         </p:txBody>
@@ -18463,7 +18464,7 @@
             <a:r>
               <a:rPr sz="1150" b="1">
                 <a:solidFill>
-                  <a:srgbClr val="DC2626"/>
+                  <a:srgbClr val="94A3B8"/>
                 </a:solidFill>
                 <a:latin typeface="Calibri"/>
               </a:rPr>
@@ -18496,13 +18497,13 @@
           <a:p>
             <a:pPr algn="l"/>
             <a:r>
-              <a:rPr sz="1150" b="0">
-                <a:solidFill>
-                  <a:srgbClr val="475569"/>
-                </a:solidFill>
-                <a:latin typeface="Calibri"/>
-              </a:rPr>
-              <a:t>Two successes — outfit rests on almost nothing</a:t>
+              <a:rPr sz="1150" b="1">
+                <a:solidFill>
+                  <a:srgbClr val="94A3B8"/>
+                </a:solidFill>
+                <a:latin typeface="Calibri"/>
+              </a:rPr>
+              <a:t>Provisional — only 2 succeeded, too few to read fit</a:t>
             </a:r>
           </a:p>
         </p:txBody>
@@ -19441,9 +19442,9 @@
           <a:p>
             <a:pPr algn="r"/>
             <a:r>
-              <a:rPr sz="1150" b="0">
-                <a:solidFill>
-                  <a:srgbClr val="475569"/>
+              <a:rPr sz="1150" b="1">
+                <a:solidFill>
+                  <a:srgbClr val="94A3B8"/>
                 </a:solidFill>
                 <a:latin typeface="Calibri"/>
               </a:rPr>
@@ -19476,13 +19477,13 @@
           <a:p>
             <a:pPr algn="l"/>
             <a:r>
-              <a:rPr sz="1150" b="0">
-                <a:solidFill>
-                  <a:srgbClr val="475569"/>
-                </a:solidFill>
-                <a:latin typeface="Calibri"/>
-              </a:rPr>
-              <a:t>Behaves as expected</a:t>
+              <a:rPr sz="1150" b="1">
+                <a:solidFill>
+                  <a:srgbClr val="94A3B8"/>
+                </a:solidFill>
+                <a:latin typeface="Calibri"/>
+              </a:rPr>
+              <a:t>Provisional — only 4 failed, too few to read fit</a:t>
             </a:r>
           </a:p>
         </p:txBody>
@@ -19602,7 +19603,7 @@
                 </a:solidFill>
                 <a:latin typeface="Calibri"/>
               </a:rPr>
-              <a:t>Ten of twelve behave, one is flagged on thin evidence, one does not behave at all.</a:t>
+              <a:t>Eleven of twelve behave or sit on too little evidence to say. One does not, and it is not close.</a:t>
             </a:r>
           </a:p>
         </p:txBody>
@@ -19837,7 +19838,7 @@
         <p:spPr>
           <a:xfrm>
             <a:off x="777240" y="1965960"/>
-            <a:ext cx="5120640" cy="1920240"/>
+            <a:ext cx="5120640" cy="1737360"/>
           </a:xfrm>
           <a:prstGeom prst="rect">
             <a:avLst/>
@@ -19883,7 +19884,7 @@
         <p:spPr>
           <a:xfrm>
             <a:off x="777240" y="1965960"/>
-            <a:ext cx="50292" cy="1920240"/>
+            <a:ext cx="50292" cy="1737360"/>
           </a:xfrm>
           <a:prstGeom prst="rect">
             <a:avLst/>
@@ -19966,7 +19967,7 @@
         <p:spPr>
           <a:xfrm>
             <a:off x="1033271" y="2624328"/>
-            <a:ext cx="4663440" cy="1097280"/>
+            <a:ext cx="4663440" cy="914399"/>
           </a:xfrm>
           <a:prstGeom prst="rect">
             <a:avLst/>
@@ -20005,7 +20006,7 @@
         <p:spPr>
           <a:xfrm>
             <a:off x="6263640" y="1965960"/>
-            <a:ext cx="5120640" cy="1920240"/>
+            <a:ext cx="5120640" cy="1737360"/>
           </a:xfrm>
           <a:prstGeom prst="rect">
             <a:avLst/>
@@ -20051,7 +20052,7 @@
         <p:spPr>
           <a:xfrm>
             <a:off x="6263640" y="1965960"/>
-            <a:ext cx="50292" cy="1920240"/>
+            <a:ext cx="50292" cy="1737360"/>
           </a:xfrm>
           <a:prstGeom prst="rect">
             <a:avLst/>
@@ -20134,7 +20135,7 @@
         <p:spPr>
           <a:xfrm>
             <a:off x="6519672" y="2624328"/>
-            <a:ext cx="4663440" cy="1097280"/>
+            <a:ext cx="4663440" cy="914399"/>
           </a:xfrm>
           <a:prstGeom prst="rect">
             <a:avLst/>
@@ -20172,7 +20173,7 @@
         </p:nvSpPr>
         <p:spPr>
           <a:xfrm>
-            <a:off x="777240" y="4160520"/>
+            <a:off x="777240" y="3931920"/>
             <a:ext cx="1463040" cy="329184"/>
           </a:xfrm>
           <a:prstGeom prst="rect">
@@ -20207,7 +20208,7 @@
         </p:nvSpPr>
         <p:spPr>
           <a:xfrm>
-            <a:off x="2240280" y="4160520"/>
+            <a:off x="2240280" y="3931920"/>
             <a:ext cx="2011680" cy="329184"/>
           </a:xfrm>
           <a:prstGeom prst="rect">
@@ -20242,7 +20243,7 @@
         </p:nvSpPr>
         <p:spPr>
           <a:xfrm>
-            <a:off x="4251960" y="4160520"/>
+            <a:off x="4251960" y="3931920"/>
             <a:ext cx="7132320" cy="329184"/>
           </a:xfrm>
           <a:prstGeom prst="rect">
@@ -20277,7 +20278,7 @@
         </p:nvCxnSpPr>
         <p:spPr>
           <a:xfrm>
-            <a:off x="777240" y="4489704"/>
+            <a:off x="777240" y="4261104"/>
             <a:ext cx="10607040" cy="0"/>
           </a:xfrm>
           <a:prstGeom prst="line">
@@ -20312,7 +20313,7 @@
         </p:nvSpPr>
         <p:spPr>
           <a:xfrm>
-            <a:off x="777240" y="4489704"/>
+            <a:off x="777240" y="4261104"/>
             <a:ext cx="1463040" cy="329184"/>
           </a:xfrm>
           <a:prstGeom prst="rect">
@@ -20347,7 +20348,7 @@
         </p:nvSpPr>
         <p:spPr>
           <a:xfrm>
-            <a:off x="2240280" y="4489704"/>
+            <a:off x="2240280" y="4261104"/>
             <a:ext cx="2011680" cy="329184"/>
           </a:xfrm>
           <a:prstGeom prst="rect">
@@ -20382,7 +20383,7 @@
         </p:nvSpPr>
         <p:spPr>
           <a:xfrm>
-            <a:off x="4251960" y="4489704"/>
+            <a:off x="4251960" y="4261104"/>
             <a:ext cx="7132320" cy="329184"/>
           </a:xfrm>
           <a:prstGeom prst="rect">
@@ -20417,7 +20418,7 @@
         </p:nvCxnSpPr>
         <p:spPr>
           <a:xfrm>
-            <a:off x="777240" y="4818888"/>
+            <a:off x="777240" y="4590288"/>
             <a:ext cx="10607040" cy="0"/>
           </a:xfrm>
           <a:prstGeom prst="line">
@@ -20452,7 +20453,7 @@
         </p:nvSpPr>
         <p:spPr>
           <a:xfrm>
-            <a:off x="777240" y="4818888"/>
+            <a:off x="777240" y="4590288"/>
             <a:ext cx="1463040" cy="329184"/>
           </a:xfrm>
           <a:prstGeom prst="rect">
@@ -20487,7 +20488,7 @@
         </p:nvSpPr>
         <p:spPr>
           <a:xfrm>
-            <a:off x="2240280" y="4818888"/>
+            <a:off x="2240280" y="4590288"/>
             <a:ext cx="2011680" cy="329184"/>
           </a:xfrm>
           <a:prstGeom prst="rect">
@@ -20522,7 +20523,7 @@
         </p:nvSpPr>
         <p:spPr>
           <a:xfrm>
-            <a:off x="4251960" y="4818888"/>
+            <a:off x="4251960" y="4590288"/>
             <a:ext cx="7132320" cy="329184"/>
           </a:xfrm>
           <a:prstGeom prst="rect">
@@ -20557,7 +20558,7 @@
         </p:nvCxnSpPr>
         <p:spPr>
           <a:xfrm>
-            <a:off x="777240" y="5148072"/>
+            <a:off x="777240" y="4919472"/>
             <a:ext cx="10607040" cy="0"/>
           </a:xfrm>
           <a:prstGeom prst="line">
@@ -20592,7 +20593,7 @@
         </p:nvSpPr>
         <p:spPr>
           <a:xfrm>
-            <a:off x="777240" y="5148072"/>
+            <a:off x="777240" y="4919472"/>
             <a:ext cx="1463040" cy="329184"/>
           </a:xfrm>
           <a:prstGeom prst="rect">
@@ -20627,7 +20628,7 @@
         </p:nvSpPr>
         <p:spPr>
           <a:xfrm>
-            <a:off x="2240280" y="5148072"/>
+            <a:off x="2240280" y="4919472"/>
             <a:ext cx="2011680" cy="329184"/>
           </a:xfrm>
           <a:prstGeom prst="rect">
@@ -20662,7 +20663,7 @@
         </p:nvSpPr>
         <p:spPr>
           <a:xfrm>
-            <a:off x="4251960" y="5148072"/>
+            <a:off x="4251960" y="4919472"/>
             <a:ext cx="7132320" cy="329184"/>
           </a:xfrm>
           <a:prstGeom prst="rect">
@@ -20697,7 +20698,7 @@
         </p:nvCxnSpPr>
         <p:spPr>
           <a:xfrm>
-            <a:off x="777240" y="5477256"/>
+            <a:off x="777240" y="5248656"/>
             <a:ext cx="10607040" cy="0"/>
           </a:xfrm>
           <a:prstGeom prst="line">
@@ -20732,7 +20733,7 @@
         </p:nvSpPr>
         <p:spPr>
           <a:xfrm>
-            <a:off x="777240" y="5477256"/>
+            <a:off x="777240" y="5248656"/>
             <a:ext cx="1463040" cy="329184"/>
           </a:xfrm>
           <a:prstGeom prst="rect">
@@ -20767,7 +20768,7 @@
         </p:nvSpPr>
         <p:spPr>
           <a:xfrm>
-            <a:off x="2240280" y="5477256"/>
+            <a:off x="2240280" y="5248656"/>
             <a:ext cx="2011680" cy="329184"/>
           </a:xfrm>
           <a:prstGeom prst="rect">
@@ -20802,7 +20803,7 @@
         </p:nvSpPr>
         <p:spPr>
           <a:xfrm>
-            <a:off x="4251960" y="5477256"/>
+            <a:off x="4251960" y="5248656"/>
             <a:ext cx="7132320" cy="329184"/>
           </a:xfrm>
           <a:prstGeom prst="rect">
@@ -20837,7 +20838,7 @@
         </p:nvCxnSpPr>
         <p:spPr>
           <a:xfrm>
-            <a:off x="777240" y="5806440"/>
+            <a:off x="777240" y="5577840"/>
             <a:ext cx="10607040" cy="0"/>
           </a:xfrm>
           <a:prstGeom prst="line">
@@ -20872,8 +20873,148 @@
         </p:nvSpPr>
         <p:spPr>
           <a:xfrm>
-            <a:off x="777240" y="5806440"/>
-            <a:ext cx="10607040" cy="365760"/>
+            <a:off x="777240" y="5577840"/>
+            <a:ext cx="1463040" cy="329184"/>
+          </a:xfrm>
+          <a:prstGeom prst="rect">
+            <a:avLst/>
+          </a:prstGeom>
+          <a:noFill/>
+        </p:spPr>
+        <p:txBody>
+          <a:bodyPr wrap="square" lIns="54864" rIns="54864" tIns="27432" bIns="27432" anchor="ctr">
+            <a:spAutoFit/>
+          </a:bodyPr>
+          <a:lstStyle/>
+          <a:p>
+            <a:pPr algn="l"/>
+            <a:r>
+              <a:rPr sz="1200" b="1">
+                <a:solidFill>
+                  <a:srgbClr val="0F172A"/>
+                </a:solidFill>
+                <a:latin typeface="Calibri"/>
+              </a:rPr>
+              <a:t>thin evidence</a:t>
+            </a:r>
+          </a:p>
+        </p:txBody>
+      </p:sp>
+      <p:sp>
+        <p:nvSpPr>
+          <p:cNvPr id="33" name="TextBox 32"/>
+          <p:cNvSpPr txBox="1"/>
+          <p:nvPr/>
+        </p:nvSpPr>
+        <p:spPr>
+          <a:xfrm>
+            <a:off x="2240280" y="5577840"/>
+            <a:ext cx="2011680" cy="329184"/>
+          </a:xfrm>
+          <a:prstGeom prst="rect">
+            <a:avLst/>
+          </a:prstGeom>
+          <a:noFill/>
+        </p:spPr>
+        <p:txBody>
+          <a:bodyPr wrap="square" lIns="54864" rIns="54864" tIns="27432" bIns="27432" anchor="ctr">
+            <a:spAutoFit/>
+          </a:bodyPr>
+          <a:lstStyle/>
+          <a:p>
+            <a:pPr algn="l"/>
+            <a:r>
+              <a:rPr sz="1200" b="1">
+                <a:solidFill>
+                  <a:srgbClr val="94A3B8"/>
+                </a:solidFill>
+                <a:latin typeface="Calibri"/>
+              </a:rPr>
+              <a:t>grey</a:t>
+            </a:r>
+          </a:p>
+        </p:txBody>
+      </p:sp>
+      <p:sp>
+        <p:nvSpPr>
+          <p:cNvPr id="34" name="TextBox 33"/>
+          <p:cNvSpPr txBox="1"/>
+          <p:nvPr/>
+        </p:nvSpPr>
+        <p:spPr>
+          <a:xfrm>
+            <a:off x="4251960" y="5577840"/>
+            <a:ext cx="7132320" cy="329184"/>
+          </a:xfrm>
+          <a:prstGeom prst="rect">
+            <a:avLst/>
+          </a:prstGeom>
+          <a:noFill/>
+        </p:spPr>
+        <p:txBody>
+          <a:bodyPr wrap="square" lIns="54864" rIns="54864" tIns="27432" bIns="27432" anchor="ctr">
+            <a:spAutoFit/>
+          </a:bodyPr>
+          <a:lstStyle/>
+          <a:p>
+            <a:pPr algn="l"/>
+            <a:r>
+              <a:rPr sz="1200" b="0">
+                <a:solidFill>
+                  <a:srgbClr val="475569"/>
+                </a:solidFill>
+                <a:latin typeface="Calibri"/>
+              </a:rPr>
+              <a:t>Provisional — under 5 on the minority side; a flagged fit is not a finding yet</a:t>
+            </a:r>
+          </a:p>
+        </p:txBody>
+      </p:sp>
+      <p:cxnSp>
+        <p:nvCxnSpPr>
+          <p:cNvPr id="35" name="Connector 34"/>
+          <p:cNvCxnSpPr/>
+          <p:nvPr/>
+        </p:nvCxnSpPr>
+        <p:spPr>
+          <a:xfrm>
+            <a:off x="777240" y="5907024"/>
+            <a:ext cx="10607040" cy="0"/>
+          </a:xfrm>
+          <a:prstGeom prst="line">
+            <a:avLst/>
+          </a:prstGeom>
+          <a:ln w="9525">
+            <a:solidFill>
+              <a:srgbClr val="E2E8F0"/>
+            </a:solidFill>
+          </a:ln>
+        </p:spPr>
+        <p:style>
+          <a:lnRef idx="2">
+            <a:schemeClr val="accent1"/>
+          </a:lnRef>
+          <a:fillRef idx="0">
+            <a:schemeClr val="accent1"/>
+          </a:fillRef>
+          <a:effectRef idx="1">
+            <a:schemeClr val="accent1"/>
+          </a:effectRef>
+          <a:fontRef idx="minor">
+            <a:schemeClr val="tx1"/>
+          </a:fontRef>
+        </p:style>
+      </p:cxnSp>
+      <p:sp>
+        <p:nvSpPr>
+          <p:cNvPr id="36" name="TextBox 35"/>
+          <p:cNvSpPr txBox="1"/>
+          <p:nvPr/>
+        </p:nvSpPr>
+        <p:spPr>
+          <a:xfrm>
+            <a:off x="777240" y="6035040"/>
+            <a:ext cx="10607040" cy="274320"/>
           </a:xfrm>
           <a:prstGeom prst="rect">
             <a:avLst/>
@@ -20892,7 +21033,7 @@
               </a:lnSpc>
             </a:pPr>
             <a:r>
-              <a:rPr sz="1200" b="0" i="1">
+              <a:rPr sz="1100" b="0" i="1">
                 <a:solidFill>
                   <a:srgbClr val="475569"/>
                 </a:solidFill>
@@ -20905,7 +21046,7 @@
       </p:sp>
       <p:sp>
         <p:nvSpPr>
-          <p:cNvPr id="33" name="TextBox 32"/>
+          <p:cNvPr id="37" name="TextBox 36"/>
           <p:cNvSpPr txBox="1"/>
           <p:nvPr/>
         </p:nvSpPr>
@@ -20944,7 +21085,7 @@
       </p:sp>
       <p:sp>
         <p:nvSpPr>
-          <p:cNvPr id="34" name="TextBox 33"/>
+          <p:cNvPr id="38" name="TextBox 37"/>
           <p:cNvSpPr txBox="1"/>
           <p:nvPr/>
         </p:nvSpPr>
